--- a/EBT629E_Project_Presentation.pptx
+++ b/EBT629E_Project_Presentation.pptx
@@ -20,6 +20,9 @@
     <p:sldId id="268" r:id="rId19"/>
     <p:sldId id="269" r:id="rId20"/>
     <p:sldId id="270" r:id="rId21"/>
+    <p:sldId id="271" r:id="rId22"/>
+    <p:sldId id="272" r:id="rId23"/>
+    <p:sldId id="273" r:id="rId24"/>
   </p:sldIdLst>
   <p:sldSz cx="12191695" cy="6858000" type="screen4x3"/>
   <p:notesSz cx="6858000" cy="9144000"/>
@@ -3300,7 +3303,119 @@
               </a:defRPr>
             </a:pPr>
             <a:r>
-              <a:t>Final Performance</a:t>
+              <a:t>KEY SLIDE: Rolling vs Multi-step Protocol</a:t>
+            </a:r>
+          </a:p>
+        </p:txBody>
+      </p:sp>
+      <p:pic>
+        <p:nvPicPr>
+          <p:cNvPr id="3" name="Picture 2" descr="rolling_forecast.png"/>
+          <p:cNvPicPr>
+            <a:picLocks noChangeAspect="1"/>
+          </p:cNvPicPr>
+          <p:nvPr/>
+        </p:nvPicPr>
+        <p:blipFill>
+          <a:blip r:embed="rId2"/>
+          <a:stretch>
+            <a:fillRect/>
+          </a:stretch>
+        </p:blipFill>
+        <p:spPr>
+          <a:xfrm>
+            <a:off x="1554480" y="1188720"/>
+            <a:ext cx="8507627" cy="4937760"/>
+          </a:xfrm>
+          <a:prstGeom prst="rect">
+            <a:avLst/>
+          </a:prstGeom>
+        </p:spPr>
+      </p:pic>
+      <p:sp>
+        <p:nvSpPr>
+          <p:cNvPr id="4" name="TextBox 3"/>
+          <p:cNvSpPr txBox="1"/>
+          <p:nvPr/>
+        </p:nvSpPr>
+        <p:spPr>
+          <a:xfrm>
+            <a:off x="457200" y="6217920"/>
+            <a:ext cx="10972800" cy="457200"/>
+          </a:xfrm>
+          <a:prstGeom prst="rect">
+            <a:avLst/>
+          </a:prstGeom>
+          <a:noFill/>
+        </p:spPr>
+        <p:txBody>
+          <a:bodyPr wrap="none">
+            <a:spAutoFit/>
+          </a:bodyPr>
+          <a:lstStyle/>
+          <a:p>
+            <a:pPr algn="ctr">
+              <a:defRPr sz="1200" i="1">
+                <a:solidFill>
+                  <a:srgbClr val="4D4D4D"/>
+                </a:solidFill>
+              </a:defRPr>
+            </a:pPr>
+            <a:r>
+              <a:t>ARIMA / LSTM see yesterday's actual. Prophet must commit to 122 days at once.</a:t>
+            </a:r>
+          </a:p>
+        </p:txBody>
+      </p:sp>
+    </p:spTree>
+  </p:cSld>
+  <p:clrMapOvr>
+    <a:masterClrMapping/>
+  </p:clrMapOvr>
+</p:sld>
+</file>
+
+<file path=ppt/slides/slide11.xml><?xml version="1.0" encoding="utf-8"?>
+<p:sld xmlns:a="http://schemas.openxmlformats.org/drawingml/2006/main" xmlns:p="http://schemas.openxmlformats.org/presentationml/2006/main" xmlns:r="http://schemas.openxmlformats.org/officeDocument/2006/relationships">
+  <p:cSld>
+    <p:spTree>
+      <p:nvGrpSpPr>
+        <p:cNvPr id="1" name=""/>
+        <p:cNvGrpSpPr/>
+        <p:nvPr/>
+      </p:nvGrpSpPr>
+      <p:grpSpPr/>
+      <p:sp>
+        <p:nvSpPr>
+          <p:cNvPr id="2" name="TextBox 1"/>
+          <p:cNvSpPr txBox="1"/>
+          <p:nvPr/>
+        </p:nvSpPr>
+        <p:spPr>
+          <a:xfrm>
+            <a:off x="457200" y="274320"/>
+            <a:ext cx="10972800" cy="731520"/>
+          </a:xfrm>
+          <a:prstGeom prst="rect">
+            <a:avLst/>
+          </a:prstGeom>
+          <a:noFill/>
+        </p:spPr>
+        <p:txBody>
+          <a:bodyPr wrap="none">
+            <a:spAutoFit/>
+          </a:bodyPr>
+          <a:lstStyle/>
+          <a:p>
+            <a:pPr>
+              <a:defRPr sz="2800" b="1">
+                <a:solidFill>
+                  <a:srgbClr val="003366"/>
+                </a:solidFill>
+              </a:defRPr>
+            </a:pPr>
+            <a:r>
+              <a:t>Final Performance, House 2</a:t>
             </a:r>
           </a:p>
         </p:txBody>
@@ -3330,7 +3445,7 @@
                 <a:gridCol w="1828800"/>
                 <a:gridCol w="1828800"/>
               </a:tblGrid>
-              <a:tr h="685800">
+              <a:tr h="548640">
                 <a:tc>
                   <a:txBody>
                     <a:bodyPr/>
@@ -3397,7 +3512,74 @@
                   <a:tcPr/>
                 </a:tc>
               </a:tr>
-              <a:tr h="685800">
+              <a:tr h="548640">
+                <a:tc>
+                  <a:txBody>
+                    <a:bodyPr/>
+                    <a:lstStyle/>
+                    <a:p>
+                      <a:r>
+                        <a:rPr sz="1400"/>
+                        <a:t>Persistence</a:t>
+                      </a:r>
+                    </a:p>
+                  </a:txBody>
+                  <a:tcPr/>
+                </a:tc>
+                <a:tc>
+                  <a:txBody>
+                    <a:bodyPr/>
+                    <a:lstStyle/>
+                    <a:p>
+                      <a:r>
+                        <a:rPr sz="1400"/>
+                        <a:t>2,426.76</a:t>
+                      </a:r>
+                    </a:p>
+                  </a:txBody>
+                  <a:tcPr/>
+                </a:tc>
+                <a:tc>
+                  <a:txBody>
+                    <a:bodyPr/>
+                    <a:lstStyle/>
+                    <a:p>
+                      <a:r>
+                        <a:rPr sz="1400"/>
+                        <a:t>49.26</a:t>
+                      </a:r>
+                    </a:p>
+                  </a:txBody>
+                  <a:tcPr/>
+                </a:tc>
+                <a:tc>
+                  <a:txBody>
+                    <a:bodyPr/>
+                    <a:lstStyle/>
+                    <a:p>
+                      <a:r>
+                        <a:rPr sz="1400"/>
+                        <a:t>33.51</a:t>
+                      </a:r>
+                    </a:p>
+                  </a:txBody>
+                  <a:tcPr/>
+                </a:tc>
+                <a:tc>
+                  <a:txBody>
+                    <a:bodyPr/>
+                    <a:lstStyle/>
+                    <a:p>
+                      <a:r>
+                        <a:rPr sz="1400"/>
+                        <a:t>0.873</a:t>
+                      </a:r>
+                    </a:p>
+                  </a:txBody>
+                  <a:tcPr/>
+                </a:tc>
+              </a:tr>
+              <a:tr h="548640">
                 <a:tc>
                   <a:txBody>
                     <a:bodyPr/>
@@ -3464,7 +3646,7 @@
                   <a:tcPr/>
                 </a:tc>
               </a:tr>
-              <a:tr h="685800">
+              <a:tr h="548640">
                 <a:tc>
                   <a:txBody>
                     <a:bodyPr/>
@@ -3485,7 +3667,7 @@
                     <a:p>
                       <a:r>
                         <a:rPr sz="1400"/>
-                        <a:t>15,436.04</a:t>
+                        <a:t>4,821.35</a:t>
                       </a:r>
                     </a:p>
                   </a:txBody>
@@ -3498,7 +3680,7 @@
                     <a:p>
                       <a:r>
                         <a:rPr sz="1400"/>
-                        <a:t>124.24</a:t>
+                        <a:t>69.44</a:t>
                       </a:r>
                     </a:p>
                   </a:txBody>
@@ -3511,7 +3693,7 @@
                     <a:p>
                       <a:r>
                         <a:rPr sz="1400"/>
-                        <a:t>93.59</a:t>
+                        <a:t>52.25</a:t>
                       </a:r>
                     </a:p>
                   </a:txBody>
@@ -3524,14 +3706,14 @@
                     <a:p>
                       <a:r>
                         <a:rPr sz="1400"/>
-                        <a:t>0.193</a:t>
+                        <a:t>0.748</a:t>
                       </a:r>
                     </a:p>
                   </a:txBody>
                   <a:tcPr/>
                 </a:tc>
               </a:tr>
-              <a:tr h="685800">
+              <a:tr h="548640">
                 <a:tc>
                   <a:txBody>
                     <a:bodyPr/>
@@ -3610,7 +3792,7 @@
 </p:sld>
 </file>
 
-<file path=ppt/slides/slide11.xml><?xml version="1.0" encoding="utf-8"?>
+<file path=ppt/slides/slide12.xml><?xml version="1.0" encoding="utf-8"?>
 <p:sld xmlns:a="http://schemas.openxmlformats.org/drawingml/2006/main" xmlns:p="http://schemas.openxmlformats.org/presentationml/2006/main" xmlns:r="http://schemas.openxmlformats.org/officeDocument/2006/relationships">
   <p:cSld>
     <p:spTree>
@@ -3709,88 +3891,11 @@
               </a:defRPr>
             </a:pPr>
             <a:r>
-              <a:t>ARIMA tracks closely, LSTM smooths peaks, Prophet captures only the baseline.</a:t>
-            </a:r>
-          </a:p>
-        </p:txBody>
-      </p:sp>
-    </p:spTree>
-  </p:cSld>
-  <p:clrMapOvr>
-    <a:masterClrMapping/>
-  </p:clrMapOvr>
-</p:sld>
-</file>
-
-<file path=ppt/slides/slide12.xml><?xml version="1.0" encoding="utf-8"?>
-<p:sld xmlns:a="http://schemas.openxmlformats.org/drawingml/2006/main" xmlns:p="http://schemas.openxmlformats.org/presentationml/2006/main" xmlns:r="http://schemas.openxmlformats.org/officeDocument/2006/relationships">
-  <p:cSld>
-    <p:spTree>
-      <p:nvGrpSpPr>
-        <p:cNvPr id="1" name=""/>
-        <p:cNvGrpSpPr/>
-        <p:nvPr/>
-      </p:nvGrpSpPr>
-      <p:grpSpPr/>
-      <p:sp>
-        <p:nvSpPr>
-          <p:cNvPr id="2" name="TextBox 1"/>
-          <p:cNvSpPr txBox="1"/>
-          <p:nvPr/>
-        </p:nvSpPr>
-        <p:spPr>
-          <a:xfrm>
-            <a:off x="457200" y="274320"/>
-            <a:ext cx="10972800" cy="731520"/>
-          </a:xfrm>
-          <a:prstGeom prst="rect">
-            <a:avLst/>
-          </a:prstGeom>
-          <a:noFill/>
-        </p:spPr>
-        <p:txBody>
-          <a:bodyPr wrap="none">
-            <a:spAutoFit/>
-          </a:bodyPr>
-          <a:lstStyle/>
-          <a:p>
-            <a:pPr>
-              <a:defRPr sz="2800" b="1">
-                <a:solidFill>
-                  <a:srgbClr val="003366"/>
-                </a:solidFill>
-              </a:defRPr>
-            </a:pPr>
-            <a:r>
-              <a:t>Metrics Side by Side</a:t>
-            </a:r>
-          </a:p>
-        </p:txBody>
-      </p:sp>
-      <p:pic>
-        <p:nvPicPr>
-          <p:cNvPr id="3" name="Picture 2" descr="metrics_comparison.png"/>
-          <p:cNvPicPr>
-            <a:picLocks noChangeAspect="1"/>
-          </p:cNvPicPr>
-          <p:nvPr/>
-        </p:nvPicPr>
-        <p:blipFill>
-          <a:blip r:embed="rId2"/>
-          <a:stretch>
-            <a:fillRect/>
-          </a:stretch>
-        </p:blipFill>
-        <p:spPr>
-          <a:xfrm>
-            <a:off x="1554480" y="1188720"/>
-            <a:ext cx="17902716" cy="4937760"/>
-          </a:xfrm>
-          <a:prstGeom prst="rect">
-            <a:avLst/>
-          </a:prstGeom>
-        </p:spPr>
-      </p:pic>
+              <a:t>ARIMA tracks closely, LSTM smooths peaks, Prophet only captures the baseline.</a:t>
+            </a:r>
+          </a:p>
+        </p:txBody>
+      </p:sp>
     </p:spTree>
   </p:cSld>
   <p:clrMapOvr>
@@ -3839,14 +3944,14 @@
               </a:defRPr>
             </a:pPr>
             <a:r>
-              <a:t>Development Iterations</a:t>
+              <a:t>Metrics Side by Side</a:t>
             </a:r>
           </a:p>
         </p:txBody>
       </p:sp>
       <p:pic>
         <p:nvPicPr>
-          <p:cNvPr id="3" name="Picture 2" descr="iteration_timeline.png"/>
+          <p:cNvPr id="3" name="Picture 2" descr="metrics_comparison.png"/>
           <p:cNvPicPr>
             <a:picLocks noChangeAspect="1"/>
           </p:cNvPicPr>
@@ -3861,7 +3966,7 @@
         <p:spPr>
           <a:xfrm>
             <a:off x="1554480" y="1188720"/>
-            <a:ext cx="9808567" cy="4937760"/>
+            <a:ext cx="17902716" cy="4937760"/>
           </a:xfrm>
           <a:prstGeom prst="rect">
             <a:avLst/>
@@ -3898,7 +4003,7 @@
               </a:defRPr>
             </a:pPr>
             <a:r>
-              <a:t>Daily resample + 7-day smoothing + rolling forecast lifted R2 from -0.13 to 0.876.</a:t>
+              <a:t>Persistence and ARIMA are nearly indistinguishable; LSTM and Prophet trail behind.</a:t>
             </a:r>
           </a:p>
         </p:txBody>
@@ -3951,21 +4056,45 @@
               </a:defRPr>
             </a:pPr>
             <a:r>
-              <a:t>Discussion</a:t>
-            </a:r>
-          </a:p>
-        </p:txBody>
-      </p:sp>
-      <p:sp>
-        <p:nvSpPr>
-          <p:cNvPr id="3" name="TextBox 2"/>
+              <a:t>KEY FINDING: Statistical Significance (Diebold-Mariano)</a:t>
+            </a:r>
+          </a:p>
+        </p:txBody>
+      </p:sp>
+      <p:pic>
+        <p:nvPicPr>
+          <p:cNvPr id="3" name="Picture 2" descr="dm_test_plot.png"/>
+          <p:cNvPicPr>
+            <a:picLocks noChangeAspect="1"/>
+          </p:cNvPicPr>
+          <p:nvPr/>
+        </p:nvPicPr>
+        <p:blipFill>
+          <a:blip r:embed="rId2"/>
+          <a:stretch>
+            <a:fillRect/>
+          </a:stretch>
+        </p:blipFill>
+        <p:spPr>
+          <a:xfrm>
+            <a:off x="1554480" y="1188720"/>
+            <a:ext cx="10985507" cy="4937760"/>
+          </a:xfrm>
+          <a:prstGeom prst="rect">
+            <a:avLst/>
+          </a:prstGeom>
+        </p:spPr>
+      </p:pic>
+      <p:sp>
+        <p:nvSpPr>
+          <p:cNvPr id="4" name="TextBox 3"/>
           <p:cNvSpPr txBox="1"/>
           <p:nvPr/>
         </p:nvSpPr>
         <p:spPr>
           <a:xfrm>
-            <a:off x="731520" y="1280160"/>
-            <a:ext cx="10515600" cy="5029200"/>
+            <a:off x="457200" y="6217920"/>
+            <a:ext cx="10972800" cy="457200"/>
           </a:xfrm>
           <a:prstGeom prst="rect">
             <a:avLst/>
@@ -3978,63 +4107,15 @@
           </a:bodyPr>
           <a:lstStyle/>
           <a:p>
-            <a:pPr>
-              <a:spcAft>
-                <a:spcPts val="800"/>
-              </a:spcAft>
-              <a:defRPr sz="2000">
+            <a:pPr algn="ctr">
+              <a:defRPr sz="1200" i="1">
                 <a:solidFill>
                   <a:srgbClr val="4D4D4D"/>
                 </a:solidFill>
               </a:defRPr>
             </a:pPr>
             <a:r>
-              <a:t>• ARIMA wins: strong lag-1 autocorrelation + rolling refit.</a:t>
-            </a:r>
-          </a:p>
-          <a:p>
-            <a:pPr>
-              <a:spcAft>
-                <a:spcPts val="800"/>
-              </a:spcAft>
-              <a:defRPr sz="2000">
-                <a:solidFill>
-                  <a:srgbClr val="4D4D4D"/>
-                </a:solidFill>
-              </a:defRPr>
-            </a:pPr>
-            <a:r>
-              <a:t>• LSTM underperforms: only 476 training sequences, data-scale bound.</a:t>
-            </a:r>
-          </a:p>
-          <a:p>
-            <a:pPr>
-              <a:spcAft>
-                <a:spcPts val="800"/>
-              </a:spcAft>
-              <a:defRPr sz="2000">
-                <a:solidFill>
-                  <a:srgbClr val="4D4D4D"/>
-                </a:solidFill>
-              </a:defRPr>
-            </a:pPr>
-            <a:r>
-              <a:t>• Prophet looks worst: unfair multi-step protocol, no test access.</a:t>
-            </a:r>
-          </a:p>
-          <a:p>
-            <a:pPr>
-              <a:spcAft>
-                <a:spcPts val="800"/>
-              </a:spcAft>
-              <a:defRPr sz="2000">
-                <a:solidFill>
-                  <a:srgbClr val="4D4D4D"/>
-                </a:solidFill>
-              </a:defRPr>
-            </a:pPr>
-            <a:r>
-              <a:t>• Hybrid models (CNN-LSTM-Transformer, STL-Prophet-LSTM) are the natural next step.</a:t>
+              <a:t>ARIMA vs Persistence: p=0.665 (NOT significant). LSTM and Prophet lose to Persistence.</a:t>
             </a:r>
           </a:p>
         </p:txBody>
@@ -4087,7 +4168,231 @@
               </a:defRPr>
             </a:pPr>
             <a:r>
-              <a:t>Conclusion and Future Work</a:t>
+              <a:t>Cross-House Validation, R2 by Model</a:t>
+            </a:r>
+          </a:p>
+        </p:txBody>
+      </p:sp>
+      <p:pic>
+        <p:nvPicPr>
+          <p:cNvPr id="3" name="Picture 2" descr="cross_house_comparison.png"/>
+          <p:cNvPicPr>
+            <a:picLocks noChangeAspect="1"/>
+          </p:cNvPicPr>
+          <p:nvPr/>
+        </p:nvPicPr>
+        <p:blipFill>
+          <a:blip r:embed="rId2"/>
+          <a:stretch>
+            <a:fillRect/>
+          </a:stretch>
+        </p:blipFill>
+        <p:spPr>
+          <a:xfrm>
+            <a:off x="1554480" y="1188720"/>
+            <a:ext cx="12027358" cy="4937760"/>
+          </a:xfrm>
+          <a:prstGeom prst="rect">
+            <a:avLst/>
+          </a:prstGeom>
+        </p:spPr>
+      </p:pic>
+      <p:sp>
+        <p:nvSpPr>
+          <p:cNvPr id="4" name="TextBox 3"/>
+          <p:cNvSpPr txBox="1"/>
+          <p:nvPr/>
+        </p:nvSpPr>
+        <p:spPr>
+          <a:xfrm>
+            <a:off x="457200" y="6217920"/>
+            <a:ext cx="10972800" cy="457200"/>
+          </a:xfrm>
+          <a:prstGeom prst="rect">
+            <a:avLst/>
+          </a:prstGeom>
+          <a:noFill/>
+        </p:spPr>
+        <p:txBody>
+          <a:bodyPr wrap="none">
+            <a:spAutoFit/>
+          </a:bodyPr>
+          <a:lstStyle/>
+          <a:p>
+            <a:pPr algn="ctr">
+              <a:defRPr sz="1200" i="1">
+                <a:solidFill>
+                  <a:srgbClr val="4D4D4D"/>
+                </a:solidFill>
+              </a:defRPr>
+            </a:pPr>
+            <a:r>
+              <a:t>Three houses (1, 2, 5). ARIMA wins narrowly on all; LSTM below Persistence on all; Prophet often negative.</a:t>
+            </a:r>
+          </a:p>
+        </p:txBody>
+      </p:sp>
+    </p:spTree>
+  </p:cSld>
+  <p:clrMapOvr>
+    <a:masterClrMapping/>
+  </p:clrMapOvr>
+</p:sld>
+</file>
+
+<file path=ppt/slides/slide16.xml><?xml version="1.0" encoding="utf-8"?>
+<p:sld xmlns:a="http://schemas.openxmlformats.org/drawingml/2006/main" xmlns:p="http://schemas.openxmlformats.org/presentationml/2006/main" xmlns:r="http://schemas.openxmlformats.org/officeDocument/2006/relationships">
+  <p:cSld>
+    <p:spTree>
+      <p:nvGrpSpPr>
+        <p:cNvPr id="1" name=""/>
+        <p:cNvGrpSpPr/>
+        <p:nvPr/>
+      </p:nvGrpSpPr>
+      <p:grpSpPr/>
+      <p:sp>
+        <p:nvSpPr>
+          <p:cNvPr id="2" name="TextBox 1"/>
+          <p:cNvSpPr txBox="1"/>
+          <p:nvPr/>
+        </p:nvSpPr>
+        <p:spPr>
+          <a:xfrm>
+            <a:off x="457200" y="274320"/>
+            <a:ext cx="10972800" cy="731520"/>
+          </a:xfrm>
+          <a:prstGeom prst="rect">
+            <a:avLst/>
+          </a:prstGeom>
+          <a:noFill/>
+        </p:spPr>
+        <p:txBody>
+          <a:bodyPr wrap="none">
+            <a:spAutoFit/>
+          </a:bodyPr>
+          <a:lstStyle/>
+          <a:p>
+            <a:pPr>
+              <a:defRPr sz="2800" b="1">
+                <a:solidFill>
+                  <a:srgbClr val="003366"/>
+                </a:solidFill>
+              </a:defRPr>
+            </a:pPr>
+            <a:r>
+              <a:t>Development Iterations</a:t>
+            </a:r>
+          </a:p>
+        </p:txBody>
+      </p:sp>
+      <p:pic>
+        <p:nvPicPr>
+          <p:cNvPr id="3" name="Picture 2" descr="iteration_timeline.png"/>
+          <p:cNvPicPr>
+            <a:picLocks noChangeAspect="1"/>
+          </p:cNvPicPr>
+          <p:nvPr/>
+        </p:nvPicPr>
+        <p:blipFill>
+          <a:blip r:embed="rId2"/>
+          <a:stretch>
+            <a:fillRect/>
+          </a:stretch>
+        </p:blipFill>
+        <p:spPr>
+          <a:xfrm>
+            <a:off x="1554480" y="1188720"/>
+            <a:ext cx="9808567" cy="4937760"/>
+          </a:xfrm>
+          <a:prstGeom prst="rect">
+            <a:avLst/>
+          </a:prstGeom>
+        </p:spPr>
+      </p:pic>
+      <p:sp>
+        <p:nvSpPr>
+          <p:cNvPr id="4" name="TextBox 3"/>
+          <p:cNvSpPr txBox="1"/>
+          <p:nvPr/>
+        </p:nvSpPr>
+        <p:spPr>
+          <a:xfrm>
+            <a:off x="457200" y="6217920"/>
+            <a:ext cx="10972800" cy="457200"/>
+          </a:xfrm>
+          <a:prstGeom prst="rect">
+            <a:avLst/>
+          </a:prstGeom>
+          <a:noFill/>
+        </p:spPr>
+        <p:txBody>
+          <a:bodyPr wrap="none">
+            <a:spAutoFit/>
+          </a:bodyPr>
+          <a:lstStyle/>
+          <a:p>
+            <a:pPr algn="ctr">
+              <a:defRPr sz="1200" i="1">
+                <a:solidFill>
+                  <a:srgbClr val="4D4D4D"/>
+                </a:solidFill>
+              </a:defRPr>
+            </a:pPr>
+            <a:r>
+              <a:t>Daily resample + 7-day smoothing + rolling forecast lifted R2 from -0.13 to 0.876.</a:t>
+            </a:r>
+          </a:p>
+        </p:txBody>
+      </p:sp>
+    </p:spTree>
+  </p:cSld>
+  <p:clrMapOvr>
+    <a:masterClrMapping/>
+  </p:clrMapOvr>
+</p:sld>
+</file>
+
+<file path=ppt/slides/slide17.xml><?xml version="1.0" encoding="utf-8"?>
+<p:sld xmlns:a="http://schemas.openxmlformats.org/drawingml/2006/main" xmlns:p="http://schemas.openxmlformats.org/presentationml/2006/main" xmlns:r="http://schemas.openxmlformats.org/officeDocument/2006/relationships">
+  <p:cSld>
+    <p:spTree>
+      <p:nvGrpSpPr>
+        <p:cNvPr id="1" name=""/>
+        <p:cNvGrpSpPr/>
+        <p:nvPr/>
+      </p:nvGrpSpPr>
+      <p:grpSpPr/>
+      <p:sp>
+        <p:nvSpPr>
+          <p:cNvPr id="2" name="TextBox 1"/>
+          <p:cNvSpPr txBox="1"/>
+          <p:nvPr/>
+        </p:nvSpPr>
+        <p:spPr>
+          <a:xfrm>
+            <a:off x="457200" y="274320"/>
+            <a:ext cx="10972800" cy="731520"/>
+          </a:xfrm>
+          <a:prstGeom prst="rect">
+            <a:avLst/>
+          </a:prstGeom>
+          <a:noFill/>
+        </p:spPr>
+        <p:txBody>
+          <a:bodyPr wrap="none">
+            <a:spAutoFit/>
+          </a:bodyPr>
+          <a:lstStyle/>
+          <a:p>
+            <a:pPr>
+              <a:defRPr sz="2800" b="1">
+                <a:solidFill>
+                  <a:srgbClr val="003366"/>
+                </a:solidFill>
+              </a:defRPr>
+            </a:pPr>
+            <a:r>
+              <a:t>Discussion</a:t>
             </a:r>
           </a:p>
         </p:txBody>
@@ -4125,7 +4430,7 @@
               </a:defRPr>
             </a:pPr>
             <a:r>
-              <a:t>• Rolling protocol is the single most impactful design choice.</a:t>
+              <a:t>• ARIMA wins, but barely: edge over Persistence is 0.003 R2 and NOT significant (p=0.665).</a:t>
             </a:r>
           </a:p>
           <a:p>
@@ -4140,7 +4445,7 @@
               </a:defRPr>
             </a:pPr>
             <a:r>
-              <a:t>• Classical statistics stay competitive at single-household daily granularity.</a:t>
+              <a:t>• Lag-1 autocorrelation is doing 99% of the work. Heavier models add nothing here.</a:t>
             </a:r>
           </a:p>
           <a:p>
@@ -4155,7 +4460,7 @@
               </a:defRPr>
             </a:pPr>
             <a:r>
-              <a:t>• Future: weather + calendar features via SARIMAX / multivariate LSTM.</a:t>
+              <a:t>• LSTM and Prophet both significantly WORSE than Persistence on all three houses.</a:t>
             </a:r>
           </a:p>
           <a:p>
@@ -4170,9 +4475,85 @@
               </a:defRPr>
             </a:pPr>
             <a:r>
-              <a:t>• Future: cross-household transfer learning across all 20 REFIT homes.</a:t>
-            </a:r>
-          </a:p>
+              <a:t>• Practical cost: ARIMA RMSE = 48.7 W (~11.2% of mean) = ~1.17 kWh/day on House 2.</a:t>
+            </a:r>
+          </a:p>
+        </p:txBody>
+      </p:sp>
+    </p:spTree>
+  </p:cSld>
+  <p:clrMapOvr>
+    <a:masterClrMapping/>
+  </p:clrMapOvr>
+</p:sld>
+</file>
+
+<file path=ppt/slides/slide18.xml><?xml version="1.0" encoding="utf-8"?>
+<p:sld xmlns:a="http://schemas.openxmlformats.org/drawingml/2006/main" xmlns:p="http://schemas.openxmlformats.org/presentationml/2006/main" xmlns:r="http://schemas.openxmlformats.org/officeDocument/2006/relationships">
+  <p:cSld>
+    <p:spTree>
+      <p:nvGrpSpPr>
+        <p:cNvPr id="1" name=""/>
+        <p:cNvGrpSpPr/>
+        <p:nvPr/>
+      </p:nvGrpSpPr>
+      <p:grpSpPr/>
+      <p:sp>
+        <p:nvSpPr>
+          <p:cNvPr id="2" name="TextBox 1"/>
+          <p:cNvSpPr txBox="1"/>
+          <p:nvPr/>
+        </p:nvSpPr>
+        <p:spPr>
+          <a:xfrm>
+            <a:off x="457200" y="274320"/>
+            <a:ext cx="10972800" cy="731520"/>
+          </a:xfrm>
+          <a:prstGeom prst="rect">
+            <a:avLst/>
+          </a:prstGeom>
+          <a:noFill/>
+        </p:spPr>
+        <p:txBody>
+          <a:bodyPr wrap="none">
+            <a:spAutoFit/>
+          </a:bodyPr>
+          <a:lstStyle/>
+          <a:p>
+            <a:pPr>
+              <a:defRPr sz="2800" b="1">
+                <a:solidFill>
+                  <a:srgbClr val="003366"/>
+                </a:solidFill>
+              </a:defRPr>
+            </a:pPr>
+            <a:r>
+              <a:t>Conclusion and Future Work</a:t>
+            </a:r>
+          </a:p>
+        </p:txBody>
+      </p:sp>
+      <p:sp>
+        <p:nvSpPr>
+          <p:cNvPr id="3" name="TextBox 2"/>
+          <p:cNvSpPr txBox="1"/>
+          <p:nvPr/>
+        </p:nvSpPr>
+        <p:spPr>
+          <a:xfrm>
+            <a:off x="731520" y="1280160"/>
+            <a:ext cx="10515600" cy="5029200"/>
+          </a:xfrm>
+          <a:prstGeom prst="rect">
+            <a:avLst/>
+          </a:prstGeom>
+          <a:noFill/>
+        </p:spPr>
+        <p:txBody>
+          <a:bodyPr wrap="none">
+            <a:spAutoFit/>
+          </a:bodyPr>
+          <a:lstStyle/>
           <a:p>
             <a:pPr>
               <a:spcAft>
@@ -4185,7 +4566,67 @@
               </a:defRPr>
             </a:pPr>
             <a:r>
-              <a:t>• Future: rolling refit Prophet for a fair multi-step comparison.</a:t>
+              <a:t>• Smoothed daily residential energy is dominated by lag-1 autocorrelation.</a:t>
+            </a:r>
+          </a:p>
+          <a:p>
+            <a:pPr>
+              <a:spcAft>
+                <a:spcPts val="800"/>
+              </a:spcAft>
+              <a:defRPr sz="2000">
+                <a:solidFill>
+                  <a:srgbClr val="4D4D4D"/>
+                </a:solidFill>
+              </a:defRPr>
+            </a:pPr>
+            <a:r>
+              <a:t>• A one-line rule (Persistence) captures almost all of the predictable structure.</a:t>
+            </a:r>
+          </a:p>
+          <a:p>
+            <a:pPr>
+              <a:spcAft>
+                <a:spcPts val="800"/>
+              </a:spcAft>
+              <a:defRPr sz="2000">
+                <a:solidFill>
+                  <a:srgbClr val="4D4D4D"/>
+                </a:solidFill>
+              </a:defRPr>
+            </a:pPr>
+            <a:r>
+              <a:t>• Methodological lesson: always report a baseline + significance test.</a:t>
+            </a:r>
+          </a:p>
+          <a:p>
+            <a:pPr>
+              <a:spcAft>
+                <a:spcPts val="800"/>
+              </a:spcAft>
+              <a:defRPr sz="2000">
+                <a:solidFill>
+                  <a:srgbClr val="4D4D4D"/>
+                </a:solidFill>
+              </a:defRPr>
+            </a:pPr>
+            <a:r>
+              <a:t>• Future: hourly target (where lag-1 is weaker) + weather/calendar features.</a:t>
+            </a:r>
+          </a:p>
+          <a:p>
+            <a:pPr>
+              <a:spcAft>
+                <a:spcPts val="800"/>
+              </a:spcAft>
+              <a:defRPr sz="2000">
+                <a:solidFill>
+                  <a:srgbClr val="4D4D4D"/>
+                </a:solidFill>
+              </a:defRPr>
+            </a:pPr>
+            <a:r>
+              <a:t>• Future: hybrid models (STL-Prophet-LSTM, CNN-LSTM-Transformer).</a:t>
             </a:r>
           </a:p>
         </p:txBody>
@@ -4846,45 +5287,21 @@
               </a:defRPr>
             </a:pPr>
             <a:r>
-              <a:t>LSTM Architecture</a:t>
-            </a:r>
-          </a:p>
-        </p:txBody>
-      </p:sp>
-      <p:pic>
-        <p:nvPicPr>
-          <p:cNvPr id="3" name="Picture 2" descr="lstm_architecture.png"/>
-          <p:cNvPicPr>
-            <a:picLocks noChangeAspect="1"/>
-          </p:cNvPicPr>
-          <p:nvPr/>
-        </p:nvPicPr>
-        <p:blipFill>
-          <a:blip r:embed="rId2"/>
-          <a:stretch>
-            <a:fillRect/>
-          </a:stretch>
-        </p:blipFill>
-        <p:spPr>
-          <a:xfrm>
-            <a:off x="1554480" y="1188720"/>
-            <a:ext cx="6182608" cy="4937760"/>
-          </a:xfrm>
-          <a:prstGeom prst="rect">
-            <a:avLst/>
-          </a:prstGeom>
-        </p:spPr>
-      </p:pic>
-      <p:sp>
-        <p:nvSpPr>
-          <p:cNvPr id="4" name="TextBox 3"/>
+              <a:t>Persistence Baseline as Sanity Check</a:t>
+            </a:r>
+          </a:p>
+        </p:txBody>
+      </p:sp>
+      <p:sp>
+        <p:nvSpPr>
+          <p:cNvPr id="3" name="TextBox 2"/>
           <p:cNvSpPr txBox="1"/>
           <p:nvPr/>
         </p:nvSpPr>
         <p:spPr>
           <a:xfrm>
-            <a:off x="457200" y="6217920"/>
-            <a:ext cx="10972800" cy="457200"/>
+            <a:off x="731520" y="1280160"/>
+            <a:ext cx="10515600" cy="5029200"/>
           </a:xfrm>
           <a:prstGeom prst="rect">
             <a:avLst/>
@@ -4897,15 +5314,63 @@
           </a:bodyPr>
           <a:lstStyle/>
           <a:p>
-            <a:pPr algn="ctr">
-              <a:defRPr sz="1200" i="1">
+            <a:pPr>
+              <a:spcAft>
+                <a:spcPts val="800"/>
+              </a:spcAft>
+              <a:defRPr sz="2000">
                 <a:solidFill>
                   <a:srgbClr val="4D4D4D"/>
                 </a:solidFill>
               </a:defRPr>
             </a:pPr>
             <a:r>
-              <a:t>3 stacked LSTM layers + dropout, 14-day input window, 128,929 trainable params.</a:t>
+              <a:t>• One-line rule: predict y[t] = y[t-1] (yesterday equals today).</a:t>
+            </a:r>
+          </a:p>
+          <a:p>
+            <a:pPr>
+              <a:spcAft>
+                <a:spcPts val="800"/>
+              </a:spcAft>
+              <a:defRPr sz="2000">
+                <a:solidFill>
+                  <a:srgbClr val="4D4D4D"/>
+                </a:solidFill>
+              </a:defRPr>
+            </a:pPr>
+            <a:r>
+              <a:t>• Zero learned parameters, runs in microseconds.</a:t>
+            </a:r>
+          </a:p>
+          <a:p>
+            <a:pPr>
+              <a:spcAft>
+                <a:spcPts val="800"/>
+              </a:spcAft>
+              <a:defRPr sz="2000">
+                <a:solidFill>
+                  <a:srgbClr val="4D4D4D"/>
+                </a:solidFill>
+              </a:defRPr>
+            </a:pPr>
+            <a:r>
+              <a:t>• Canonical sanity check: any model that cannot beat this learned nothing.</a:t>
+            </a:r>
+          </a:p>
+          <a:p>
+            <a:pPr>
+              <a:spcAft>
+                <a:spcPts val="800"/>
+              </a:spcAft>
+              <a:defRPr sz="2000">
+                <a:solidFill>
+                  <a:srgbClr val="4D4D4D"/>
+                </a:solidFill>
+              </a:defRPr>
+            </a:pPr>
+            <a:r>
+              <a:t>• Runs under the same rolling protocol as ARIMA and LSTM.</a:t>
             </a:r>
           </a:p>
         </p:txBody>
@@ -4958,14 +5423,14 @@
               </a:defRPr>
             </a:pPr>
             <a:r>
-              <a:t>FB-Prophet Decomposition</a:t>
+              <a:t>LSTM Architecture</a:t>
             </a:r>
           </a:p>
         </p:txBody>
       </p:sp>
       <p:pic>
         <p:nvPicPr>
-          <p:cNvPr id="3" name="Picture 2" descr="prophet_components.png"/>
+          <p:cNvPr id="3" name="Picture 2" descr="lstm_architecture.png"/>
           <p:cNvPicPr>
             <a:picLocks noChangeAspect="1"/>
           </p:cNvPicPr>
@@ -4980,7 +5445,7 @@
         <p:spPr>
           <a:xfrm>
             <a:off x="1554480" y="1188720"/>
-            <a:ext cx="4937760" cy="4937760"/>
+            <a:ext cx="6182608" cy="4937760"/>
           </a:xfrm>
           <a:prstGeom prst="rect">
             <a:avLst/>
@@ -5017,7 +5482,7 @@
               </a:defRPr>
             </a:pPr>
             <a:r>
-              <a:t>Weekly + yearly seasonality, multiplicative mode, default changepoint scale.</a:t>
+              <a:t>3 stacked LSTM layers + dropout, 14-day input window, 128,929 trainable params.</a:t>
             </a:r>
           </a:p>
         </p:txBody>
@@ -5070,14 +5535,14 @@
               </a:defRPr>
             </a:pPr>
             <a:r>
-              <a:t>KEY SLIDE: Rolling vs Multi-step Protocol</a:t>
+              <a:t>FB-Prophet Decomposition</a:t>
             </a:r>
           </a:p>
         </p:txBody>
       </p:sp>
       <p:pic>
         <p:nvPicPr>
-          <p:cNvPr id="3" name="Picture 2" descr="rolling_forecast.png"/>
+          <p:cNvPr id="3" name="Picture 2" descr="prophet_components.png"/>
           <p:cNvPicPr>
             <a:picLocks noChangeAspect="1"/>
           </p:cNvPicPr>
@@ -5092,7 +5557,7 @@
         <p:spPr>
           <a:xfrm>
             <a:off x="1554480" y="1188720"/>
-            <a:ext cx="8507627" cy="4937760"/>
+            <a:ext cx="4937760" cy="4937760"/>
           </a:xfrm>
           <a:prstGeom prst="rect">
             <a:avLst/>
@@ -5129,7 +5594,7 @@
               </a:defRPr>
             </a:pPr>
             <a:r>
-              <a:t>ARIMA / LSTM see yesterday's actual. Prophet must commit to 122 days at once.</a:t>
+              <a:t>Weekly + yearly seasonality, multiplicative mode, default changepoint scale.</a:t>
             </a:r>
           </a:p>
         </p:txBody>
